--- a/Workshop_WSL2_Linux_unterrichten.pptx
+++ b/Workshop_WSL2_Linux_unterrichten.pptx
@@ -778,7 +778,7 @@
           <a:p>
             <a:r>
               <a:rPr lang="en-US" dirty="0"/>
-              <a:t>Der Bogen: Was die Lehrer heute in der Sandbox erlebt haben, ist exakt die Schülerperspektive – die Demo hat gezeigt, wie sie diese Situation im eigenen Raum herstellen. Murmelrunde starten, danach 2–3 Stimmen einsammeln (verschiedene Berufe abfragen: FISI, FIAE, ITSE, kaufmännische IT-Berufe). LPI-Themen nennen: 103.1, 103.2, 103.4 waren die heutige Basis; 104.5 Dateirechte der logische nächste Schritt.</a:t>
+              <a:t>Der Bogen: Was die Lehrer heute am Übungsserver erlebt haben, ist exakt die Schülerperspektive – und den Server können sie mit den mitgegebenen Skripten (setup-workshop.sh) in Minuten selbst nachbauen, z. B. in einer WSL2-Instanz. Murmelrunde starten, danach 2–3 Stimmen einsammeln (verschiedene Berufe abfragen: FISI, FIAE, ITSE, kaufmännische IT-Berufe). LPI-Themen nennen: 103.1, 103.2, 103.4 waren die heutige Basis; 104.5 Dateirechte der logische nächste Schritt.</a:t>
             </a:r>
             <a:endParaRPr lang="en-US" dirty="0"/>
           </a:p>
@@ -1482,7 +1482,7 @@
           <a:p>
             <a:r>
               <a:rPr lang="en-US" dirty="0"/>
-              <a:t>CHECKPOINT-FOLIE – hier nicht weitergehen, bevor jedes Team einen Prompt hat. QR-Code vorher einfügen (Platzhalter rechts). Sandbox vorab mit frischem Account/Gerät getestet? Zeitlimits der Plattform beachten (Killercoda: ~60 Min pro Session – reicht genau). Wer mit eigenem WSL2 arbeiten will: gern, gleiche Aufgaben. Arbeitsblätter jetzt austeilen.</a:t>
+              <a:t>CHECKPOINT-FOLIE – hier nicht weitergehen, bevor jedes Team einen Prompt hat. VORHER: setup-workshop.sh auf dem Übungsserver ausführen, echte IP-Adresse auf dieser Folie eintragen (Platzhalter 10.0.0.5), Zugangsdaten-Zettel je Team (user01–user20, Passwort akademieNN). Typische Hänger: Fingerprint-Frage (mit yes beantworten), Tippfehler in der IP, Firmen-Notebooks mit blockiertem Port 22 – dafür 1–2 Leihgeräte oder Teams mischen. Wer mit eigenem WSL2 arbeiten will: gern, gleiche Aufgaben. Arbeitsblätter jetzt austeilen.</a:t>
             </a:r>
             <a:endParaRPr lang="en-US" dirty="0"/>
           </a:p>
@@ -3282,7 +3282,7 @@
                 <a:ea typeface="Courier New" pitchFamily="34" charset="-122"/>
                 <a:cs typeface="Courier New" pitchFamily="34" charset="-120"/>
               </a:rPr>
-              <a:t>$ curl -O &lt;LINK-VOM-BEAMER&gt;/server.log</a:t>
+              <a:t>$ cp /srv/workshop/server.log .</a:t>
             </a:r>
             <a:endParaRPr lang="en-US" sz="1300" dirty="0"/>
           </a:p>
@@ -3969,7 +3969,7 @@
                 <a:ea typeface="Calibri" pitchFamily="34" charset="-122"/>
                 <a:cs typeface="Calibri" pitchFamily="34" charset="-120"/>
               </a:rPr>
-              <a:t>Heute erlebt: die Sandbox</a:t>
+              <a:t>Heute erlebt: der Übungsserver</a:t>
             </a:r>
             <a:endParaRPr lang="en-US" sz="1350" dirty="0"/>
           </a:p>
@@ -4008,7 +4008,7 @@
                 <a:ea typeface="Calibri" pitchFamily="34" charset="-122"/>
                 <a:cs typeface="Calibri" pitchFamily="34" charset="-120"/>
               </a:rPr>
-              <a:t>Ihre Schüler starten genauso – Browser auf, loslegen. Null Setup, ideal für die erste Stunde.</a:t>
+              <a:t>Ein Linux im Netz, 40 Konten, SSH – die Setup-Skripte dafür nehmen Sie fertig mit.</a:t>
             </a:r>
             <a:endParaRPr lang="en-US" sz="1100" dirty="0"/>
           </a:p>
@@ -5593,7 +5593,7 @@
                 <a:ea typeface="Calibri" pitchFamily="34" charset="-122"/>
                 <a:cs typeface="Calibri" pitchFamily="34" charset="-120"/>
               </a:rPr>
-              <a:t>Hands-on in der Browser-Sandbox: Kommandozeilen-Rallye und der Server-Krimi mit Pipes</a:t>
+              <a:t>Hands-on auf dem Übungsserver per SSH: Kommandozeilen-Rallye und der Server-Krimi mit Pipes</a:t>
             </a:r>
             <a:endParaRPr lang="en-US" sz="1250" dirty="0"/>
           </a:p>
@@ -8207,7 +8207,7 @@
                 <a:ea typeface="Calibri" pitchFamily="34" charset="-122"/>
                 <a:cs typeface="Calibri" pitchFamily="34" charset="-120"/>
               </a:rPr>
-              <a:t>Plan B existiert immer: </a:t>
+              <a:t>Und fürs Üben braucht es all das gar nicht: </a:t>
             </a:r>
             <a:pPr indent="0" marL="0">
               <a:buNone/>
@@ -8221,7 +8221,7 @@
                 <a:ea typeface="Calibri" pitchFamily="34" charset="-122"/>
                 <a:cs typeface="Calibri" pitchFamily="34" charset="-120"/>
               </a:rPr>
-              <a:t>Browser-Sandboxes ohne jede Installation – gleich arbeiten Sie selbst darin.</a:t>
+              <a:t>Ein gemeinsamer Linux-Server im Netz genügt – gleich arbeiten Sie selbst auf einem.</a:t>
             </a:r>
             <a:endParaRPr lang="en-US" sz="1400" dirty="0"/>
           </a:p>
@@ -8355,7 +8355,7 @@
                 <a:ea typeface="Calibri" pitchFamily="34" charset="-122"/>
                 <a:cs typeface="Calibri" pitchFamily="34" charset="-120"/>
               </a:rPr>
-              <a:t>Linux im Browser – ohne Installation, ohne Anmeldung am eigenen System</a:t>
+              <a:t>Per SSH auf unseren Übungsserver – der Client steckt schon in Ihrem Windows</a:t>
             </a:r>
             <a:endParaRPr lang="en-US" sz="1700" dirty="0"/>
           </a:p>
@@ -8409,7 +8409,7 @@
         <p:spPr>
           <a:xfrm>
             <a:off x="1078992" y="2962656"/>
-            <a:ext cx="6035040" cy="411480"/>
+            <a:ext cx="5212080" cy="411480"/>
           </a:xfrm>
           <a:prstGeom prst="rect">
             <a:avLst/>
@@ -8433,7 +8433,7 @@
                 <a:ea typeface="Calibri" pitchFamily="34" charset="-122"/>
                 <a:cs typeface="Calibri" pitchFamily="34" charset="-120"/>
               </a:rPr>
-              <a:t>QR-Code scannen oder Link vom Beamer öffnen</a:t>
+              <a:t>PowerShell öffnen – mehr braucht es nicht</a:t>
             </a:r>
             <a:endParaRPr lang="en-US" sz="1500" dirty="0"/>
           </a:p>
@@ -8487,7 +8487,7 @@
         <p:spPr>
           <a:xfrm>
             <a:off x="1078992" y="3529584"/>
-            <a:ext cx="6035040" cy="411480"/>
+            <a:ext cx="5212080" cy="411480"/>
           </a:xfrm>
           <a:prstGeom prst="rect">
             <a:avLst/>
@@ -8511,7 +8511,7 @@
                 <a:ea typeface="Calibri" pitchFamily="34" charset="-122"/>
                 <a:cs typeface="Calibri" pitchFamily="34" charset="-120"/>
               </a:rPr>
-              <a:t>Warten, bis der Prompt erscheint: $</a:t>
+              <a:t>Mit der Team-Nummer anmelden – das Passwort bleibt unsichtbar</a:t>
             </a:r>
             <a:endParaRPr lang="en-US" sz="1500" dirty="0"/>
           </a:p>
@@ -8565,7 +8565,7 @@
         <p:spPr>
           <a:xfrm>
             <a:off x="1078992" y="4096512"/>
-            <a:ext cx="6035040" cy="411480"/>
+            <a:ext cx="5212080" cy="411480"/>
           </a:xfrm>
           <a:prstGeom prst="rect">
             <a:avLst/>
@@ -8589,7 +8589,7 @@
                 <a:ea typeface="Calibri" pitchFamily="34" charset="-122"/>
                 <a:cs typeface="Calibri" pitchFamily="34" charset="-120"/>
               </a:rPr>
-              <a:t>Zu zweit an ein Gerät: eine Person tippt, eine liest vor</a:t>
+              <a:t>Zu zweit: eine Person tippt, eine liest vor</a:t>
             </a:r>
             <a:endParaRPr lang="en-US" sz="1500" dirty="0"/>
           </a:p>
@@ -8603,73 +8603,186 @@
         </p:nvSpPr>
         <p:spPr>
           <a:xfrm>
-            <a:off x="6720840" y="2697480"/>
-            <a:ext cx="1920240" cy="1920240"/>
+            <a:off x="6126480" y="2697480"/>
+            <a:ext cx="2560320" cy="1965960"/>
           </a:xfrm>
           <a:prstGeom prst="roundRect">
             <a:avLst>
-              <a:gd name="adj" fmla="val 3810"/>
+              <a:gd name="adj" fmla="val 2791"/>
             </a:avLst>
           </a:prstGeom>
           <a:solidFill>
-            <a:srgbClr val="FFFFFF"/>
+            <a:srgbClr val="1C242E"/>
           </a:solidFill>
           <a:ln/>
-        </p:spPr>
-      </p:sp>
-      <p:sp>
-        <p:nvSpPr>
-          <p:cNvPr id="12" name="Text 9"/>
-          <p:cNvSpPr/>
-          <p:nvPr/>
-        </p:nvSpPr>
-        <p:spPr>
-          <a:xfrm>
-            <a:off x="6720840" y="2697480"/>
-            <a:ext cx="1920240" cy="1920240"/>
-          </a:xfrm>
-          <a:prstGeom prst="rect">
-            <a:avLst/>
-          </a:prstGeom>
-          <a:noFill/>
-          <a:ln/>
-        </p:spPr>
-        <p:txBody>
-          <a:bodyPr wrap="square" rtlCol="0" anchor="ctr"/>
-          <a:lstStyle/>
-          <a:p>
-            <a:pPr algn="ctr" indent="0" marL="0">
-              <a:buNone/>
-            </a:pPr>
-            <a:r>
-              <a:rPr lang="en-US" sz="1300" dirty="0">
-                <a:solidFill>
-                  <a:srgbClr val="66727F"/>
-                </a:solidFill>
-                <a:latin typeface="Calibri" pitchFamily="34" charset="0"/>
-                <a:ea typeface="Calibri" pitchFamily="34" charset="-122"/>
-                <a:cs typeface="Calibri" pitchFamily="34" charset="-120"/>
-              </a:rPr>
-              <a:t>QR-Code</a:t>
-            </a:r>
-            <a:endParaRPr lang="en-US" sz="1300" dirty="0"/>
-          </a:p>
-          <a:p>
-            <a:pPr algn="ctr" indent="0" marL="0">
-              <a:buNone/>
-            </a:pPr>
-            <a:r>
-              <a:rPr lang="en-US" sz="1300" dirty="0">
-                <a:solidFill>
-                  <a:srgbClr val="66727F"/>
-                </a:solidFill>
-                <a:latin typeface="Calibri" pitchFamily="34" charset="0"/>
-                <a:ea typeface="Calibri" pitchFamily="34" charset="-122"/>
-                <a:cs typeface="Calibri" pitchFamily="34" charset="-120"/>
-              </a:rPr>
-              <a:t>Sandbox-Link</a:t>
-            </a:r>
-            <a:endParaRPr lang="en-US" sz="1300" dirty="0"/>
+          <a:effectLst>
+            <a:outerShdw sx="100000" sy="100000" kx="0" ky="0" algn="bl" rotWithShape="0" blurRad="101600" dist="38100" dir="5400000">
+              <a:srgbClr val="000000">
+                <a:alpha val="25000"/>
+              </a:srgbClr>
+            </a:outerShdw>
+          </a:effectLst>
+        </p:spPr>
+      </p:sp>
+      <p:sp>
+        <p:nvSpPr>
+          <p:cNvPr id="12" name="Shape 9"/>
+          <p:cNvSpPr/>
+          <p:nvPr/>
+        </p:nvSpPr>
+        <p:spPr>
+          <a:xfrm>
+            <a:off x="6254496" y="2807208"/>
+            <a:ext cx="100584" cy="100584"/>
+          </a:xfrm>
+          <a:prstGeom prst="ellipse">
+            <a:avLst/>
+          </a:prstGeom>
+          <a:solidFill>
+            <a:srgbClr val="E9645A"/>
+          </a:solidFill>
+          <a:ln/>
+        </p:spPr>
+      </p:sp>
+      <p:sp>
+        <p:nvSpPr>
+          <p:cNvPr id="13" name="Shape 10"/>
+          <p:cNvSpPr/>
+          <p:nvPr/>
+        </p:nvSpPr>
+        <p:spPr>
+          <a:xfrm>
+            <a:off x="6437376" y="2807208"/>
+            <a:ext cx="100584" cy="100584"/>
+          </a:xfrm>
+          <a:prstGeom prst="ellipse">
+            <a:avLst/>
+          </a:prstGeom>
+          <a:solidFill>
+            <a:srgbClr val="F0B429"/>
+          </a:solidFill>
+          <a:ln/>
+        </p:spPr>
+      </p:sp>
+      <p:sp>
+        <p:nvSpPr>
+          <p:cNvPr id="14" name="Shape 11"/>
+          <p:cNvSpPr/>
+          <p:nvPr/>
+        </p:nvSpPr>
+        <p:spPr>
+          <a:xfrm>
+            <a:off x="6620256" y="2807208"/>
+            <a:ext cx="100584" cy="100584"/>
+          </a:xfrm>
+          <a:prstGeom prst="ellipse">
+            <a:avLst/>
+          </a:prstGeom>
+          <a:solidFill>
+            <a:srgbClr val="5ECC71"/>
+          </a:solidFill>
+          <a:ln/>
+        </p:spPr>
+      </p:sp>
+      <p:sp>
+        <p:nvSpPr>
+          <p:cNvPr id="15" name="Text 12"/>
+          <p:cNvSpPr/>
+          <p:nvPr/>
+        </p:nvSpPr>
+        <p:spPr>
+          <a:xfrm>
+            <a:off x="6291072" y="3008376"/>
+            <a:ext cx="2231136" cy="1545336"/>
+          </a:xfrm>
+          <a:prstGeom prst="rect">
+            <a:avLst/>
+          </a:prstGeom>
+          <a:noFill/>
+          <a:ln/>
+        </p:spPr>
+        <p:txBody>
+          <a:bodyPr wrap="square" lIns="0" tIns="0" rIns="0" bIns="0" rtlCol="0" anchor="t"/>
+          <a:lstStyle/>
+          <a:p>
+            <a:pPr algn="l" indent="0" marL="0">
+              <a:lnSpc>
+                <a:spcPts val="1668"/>
+              </a:lnSpc>
+              <a:buNone/>
+            </a:pPr>
+            <a:r>
+              <a:rPr lang="en-US" sz="1150" dirty="0">
+                <a:solidFill>
+                  <a:srgbClr val="9AA7B4"/>
+                </a:solidFill>
+                <a:latin typeface="Courier New" pitchFamily="34" charset="0"/>
+                <a:ea typeface="Courier New" pitchFamily="34" charset="-122"/>
+                <a:cs typeface="Courier New" pitchFamily="34" charset="-120"/>
+              </a:rPr>
+              <a:t>PS C:\&gt; ssh \</a:t>
+            </a:r>
+            <a:endParaRPr lang="en-US" sz="1150" dirty="0"/>
+          </a:p>
+          <a:p>
+            <a:pPr algn="l" indent="0" marL="0">
+              <a:lnSpc>
+                <a:spcPts val="1668"/>
+              </a:lnSpc>
+              <a:buNone/>
+            </a:pPr>
+            <a:r>
+              <a:rPr lang="en-US" sz="1150" b="1" dirty="0">
+                <a:solidFill>
+                  <a:srgbClr val="35C88E"/>
+                </a:solidFill>
+                <a:latin typeface="Courier New" pitchFamily="34" charset="0"/>
+                <a:ea typeface="Courier New" pitchFamily="34" charset="-122"/>
+                <a:cs typeface="Courier New" pitchFamily="34" charset="-120"/>
+              </a:rPr>
+              <a:t>  user07@10.0.0.5</a:t>
+            </a:r>
+            <a:endParaRPr lang="en-US" sz="1150" dirty="0"/>
+          </a:p>
+          <a:p>
+            <a:pPr algn="l" indent="0" marL="0">
+              <a:lnSpc>
+                <a:spcPts val="1668"/>
+              </a:lnSpc>
+              <a:buNone/>
+            </a:pPr>
+            <a:r>
+              <a:rPr lang="en-US" sz="1150" dirty="0">
+                <a:solidFill>
+                  <a:srgbClr val="9AA7B4"/>
+                </a:solidFill>
+                <a:latin typeface="Courier New" pitchFamily="34" charset="0"/>
+                <a:ea typeface="Courier New" pitchFamily="34" charset="-122"/>
+                <a:cs typeface="Courier New" pitchFamily="34" charset="-120"/>
+              </a:rPr>
+              <a:t>password: ********</a:t>
+            </a:r>
+            <a:endParaRPr lang="en-US" sz="1150" dirty="0"/>
+          </a:p>
+          <a:p>
+            <a:pPr algn="l" indent="0" marL="0">
+              <a:lnSpc>
+                <a:spcPts val="1668"/>
+              </a:lnSpc>
+              <a:buNone/>
+            </a:pPr>
+            <a:r>
+              <a:rPr lang="en-US" sz="1150" b="1" dirty="0">
+                <a:solidFill>
+                  <a:srgbClr val="35C88E"/>
+                </a:solidFill>
+                <a:latin typeface="Courier New" pitchFamily="34" charset="0"/>
+                <a:ea typeface="Courier New" pitchFamily="34" charset="-122"/>
+                <a:cs typeface="Courier New" pitchFamily="34" charset="-120"/>
+              </a:rPr>
+              <a:t>user07@srv:~$ _</a:t>
+            </a:r>
+            <a:endParaRPr lang="en-US" sz="1150" dirty="0"/>
           </a:p>
         </p:txBody>
       </p:sp>
